--- a/system-design-101/vi/lessons/sd-09-004/slides/sd-09-004.pptx
+++ b/system-design-101/vi/lessons/sd-09-004/slides/sd-09-004.pptx
@@ -7361,7 +7361,7 @@
               <a:buNone/>
             </a:pPr>
             <a:r>
-              <a:rPr lang="en-US" sz="2250" dirty="0" spc="-32" kern="0">
+              <a:rPr lang="en-US" sz="2250" dirty="0" spc="-26" kern="0">
                 <a:solidFill>
                   <a:srgbClr val="E4E1D8"/>
                 </a:solidFill>
@@ -7369,10 +7369,10 @@
                 <a:ea typeface="Be Vietnam Pro" pitchFamily="34" charset="-122"/>
                 <a:cs typeface="Be Vietnam Pro" pitchFamily="34" charset="-120"/>
               </a:rPr>
-              <a:t>Remote</a:t>
-            </a:r>
-            <a:r>
-              <a:rPr lang="en-US" sz="2250" dirty="0" spc="5" kern="0">
+              <a:t>Remote:</a:t>
+            </a:r>
+            <a:r>
+              <a:rPr lang="en-US" sz="2250" dirty="0" spc="-1" kern="0">
                 <a:solidFill>
                   <a:srgbClr val="E4E1D8"/>
                 </a:solidFill>
@@ -7380,10 +7380,10 @@
                 <a:ea typeface="Be Vietnam Pro" pitchFamily="34" charset="-122"/>
                 <a:cs typeface="Be Vietnam Pro" pitchFamily="34" charset="-120"/>
               </a:rPr>
-              <a:t> có</a:t>
-            </a:r>
-            <a:r>
-              <a:rPr lang="en-US" sz="2250" dirty="0" spc="0" kern="0">
+              <a:t> GitHub,</a:t>
+            </a:r>
+            <a:r>
+              <a:rPr lang="en-US" sz="2250" dirty="0" spc="1" kern="0">
                 <a:solidFill>
                   <a:srgbClr val="E4E1D8"/>
                 </a:solidFill>
@@ -7391,7 +7391,18 @@
                 <a:ea typeface="Be Vietnam Pro" pitchFamily="34" charset="-122"/>
                 <a:cs typeface="Be Vietnam Pro" pitchFamily="34" charset="-120"/>
               </a:rPr>
-              <a:t> thể là</a:t>
+              <a:t> dịch</a:t>
+            </a:r>
+            <a:r>
+              <a:rPr lang="en-US" sz="2250" dirty="0" spc="2" kern="0">
+                <a:solidFill>
+                  <a:srgbClr val="E4E1D8"/>
+                </a:solidFill>
+                <a:latin typeface="Be Vietnam Pro" pitchFamily="34" charset="0"/>
+                <a:ea typeface="Be Vietnam Pro" pitchFamily="34" charset="-122"/>
+                <a:cs typeface="Be Vietnam Pro" pitchFamily="34" charset="-120"/>
+              </a:rPr>
+              <a:t> vụ</a:t>
             </a:r>
             <a:r>
               <a:rPr lang="en-US" sz="2250" dirty="0" spc="-1" kern="0">
@@ -7402,10 +7413,10 @@
                 <a:ea typeface="Be Vietnam Pro" pitchFamily="34" charset="-122"/>
                 <a:cs typeface="Be Vietnam Pro" pitchFamily="34" charset="-120"/>
               </a:rPr>
-              <a:t> GitHub,</a:t>
-            </a:r>
-            <a:r>
-              <a:rPr lang="en-US" sz="2250" dirty="0" spc="1" kern="0">
+              <a:t> khác,</a:t>
+            </a:r>
+            <a:r>
+              <a:rPr lang="en-US" sz="2250" dirty="0" spc="-2" kern="0">
                 <a:solidFill>
                   <a:srgbClr val="E4E1D8"/>
                 </a:solidFill>
@@ -7413,10 +7424,10 @@
                 <a:ea typeface="Be Vietnam Pro" pitchFamily="34" charset="-122"/>
                 <a:cs typeface="Be Vietnam Pro" pitchFamily="34" charset="-120"/>
               </a:rPr>
-              <a:t> dịch</a:t>
-            </a:r>
-            <a:r>
-              <a:rPr lang="en-US" sz="2250" dirty="0" spc="3" kern="0">
+              <a:t> hoặc</a:t>
+            </a:r>
+            <a:r>
+              <a:rPr lang="en-US" sz="2250" dirty="0" spc="-1" kern="0">
                 <a:solidFill>
                   <a:srgbClr val="E4E1D8"/>
                 </a:solidFill>
@@ -7424,51 +7435,7 @@
                 <a:ea typeface="Be Vietnam Pro" pitchFamily="34" charset="-122"/>
                 <a:cs typeface="Be Vietnam Pro" pitchFamily="34" charset="-120"/>
               </a:rPr>
-              <a:t> vụ</a:t>
-            </a:r>
-            <a:r>
-              <a:rPr lang="en-US" sz="2250" dirty="0" spc="0" kern="0">
-                <a:solidFill>
-                  <a:srgbClr val="E4E1D8"/>
-                </a:solidFill>
-                <a:latin typeface="Be Vietnam Pro" pitchFamily="34" charset="0"/>
-                <a:ea typeface="Be Vietnam Pro" pitchFamily="34" charset="-122"/>
-                <a:cs typeface="Be Vietnam Pro" pitchFamily="34" charset="-120"/>
-              </a:rPr>
-              <a:t> khác</a:t>
-            </a:r>
-            <a:r>
-              <a:rPr lang="en-US" sz="2250" dirty="0" spc="-3" kern="0">
-                <a:solidFill>
-                  <a:srgbClr val="E4E1D8"/>
-                </a:solidFill>
-                <a:latin typeface="Be Vietnam Pro" pitchFamily="34" charset="0"/>
-                <a:ea typeface="Be Vietnam Pro" pitchFamily="34" charset="-122"/>
-                <a:cs typeface="Be Vietnam Pro" pitchFamily="34" charset="-120"/>
-              </a:rPr>
-              <a:t> hoặc</a:t>
-            </a:r>
-            <a:r>
-              <a:rPr lang="en-US" sz="2250" dirty="0" spc="0" kern="0">
-                <a:solidFill>
-                  <a:srgbClr val="E4E1D8"/>
-                </a:solidFill>
-                <a:latin typeface="Be Vietnam Pro" pitchFamily="34" charset="0"/>
-                <a:ea typeface="Be Vietnam Pro" pitchFamily="34" charset="-122"/>
-                <a:cs typeface="Be Vietnam Pro" pitchFamily="34" charset="-120"/>
-              </a:rPr>
               <a:t> kho</a:t>
-            </a:r>
-            <a:r>
-              <a:rPr lang="en-US" sz="2250" dirty="0" spc="1" kern="0">
-                <a:solidFill>
-                  <a:srgbClr val="E4E1D8"/>
-                </a:solidFill>
-                <a:latin typeface="Be Vietnam Pro" pitchFamily="34" charset="0"/>
-                <a:ea typeface="Be Vietnam Pro" pitchFamily="34" charset="-122"/>
-                <a:cs typeface="Be Vietnam Pro" pitchFamily="34" charset="-120"/>
-              </a:rPr>
-              <a:t> nhóm</a:t>
             </a:r>
             <a:r>
               <a:rPr lang="en-US" sz="2250" dirty="0" spc="4" kern="0">
@@ -11095,7 +11062,29 @@
                 <a:ea typeface="Be Vietnam Pro" pitchFamily="34" charset="-122"/>
                 <a:cs typeface="Be Vietnam Pro" pitchFamily="34" charset="-120"/>
               </a:rPr>
-              <a:t> nên</a:t>
+              <a:t> phải</a:t>
+            </a:r>
+            <a:r>
+              <a:rPr lang="en-US" sz="2400" dirty="0" spc="2" kern="0">
+                <a:solidFill>
+                  <a:srgbClr val="E4E1D8"/>
+                </a:solidFill>
+                <a:latin typeface="Be Vietnam Pro" pitchFamily="34" charset="0"/>
+                <a:ea typeface="Be Vietnam Pro" pitchFamily="34" charset="-122"/>
+                <a:cs typeface="Be Vietnam Pro" pitchFamily="34" charset="-120"/>
+              </a:rPr>
+              <a:t> mọi</a:t>
+            </a:r>
+            <a:r>
+              <a:rPr lang="en-US" sz="2400" dirty="0" spc="0" kern="0">
+                <a:solidFill>
+                  <a:srgbClr val="E4E1D8"/>
+                </a:solidFill>
+                <a:latin typeface="Be Vietnam Pro" pitchFamily="34" charset="0"/>
+                <a:ea typeface="Be Vietnam Pro" pitchFamily="34" charset="-122"/>
+                <a:cs typeface="Be Vietnam Pro" pitchFamily="34" charset="-120"/>
+              </a:rPr>
+              <a:t> cách</a:t>
             </a:r>
             <a:r>
               <a:rPr lang="en-US" sz="2400" dirty="0" spc="3" kern="0">
@@ -11106,10 +11095,10 @@
                 <a:ea typeface="Be Vietnam Pro" pitchFamily="34" charset="-122"/>
                 <a:cs typeface="Be Vietnam Pro" pitchFamily="34" charset="-120"/>
               </a:rPr>
-              <a:t> mô</a:t>
-            </a:r>
-            <a:r>
-              <a:rPr lang="en-US" sz="2400" dirty="0" spc="-13" kern="0">
+              <a:t> dùng</a:t>
+            </a:r>
+            <a:r>
+              <a:rPr lang="en-US" sz="2400" dirty="0" spc="11" kern="0">
                 <a:solidFill>
                   <a:srgbClr val="E4E1D8"/>
                 </a:solidFill>
@@ -11117,62 +11106,7 @@
                 <a:ea typeface="Be Vietnam Pro" pitchFamily="34" charset="-122"/>
                 <a:cs typeface="Be Vietnam Pro" pitchFamily="34" charset="-120"/>
               </a:rPr>
-              <a:t> tả</a:t>
-            </a:r>
-            <a:r>
-              <a:rPr lang="en-US" sz="2400" dirty="0" spc="2" kern="0">
-                <a:solidFill>
-                  <a:srgbClr val="E4E1D8"/>
-                </a:solidFill>
-                <a:latin typeface="Be Vietnam Pro" pitchFamily="34" charset="0"/>
-                <a:ea typeface="Be Vietnam Pro" pitchFamily="34" charset="-122"/>
-                <a:cs typeface="Be Vietnam Pro" pitchFamily="34" charset="-120"/>
-              </a:rPr>
-              <a:t> mọi</a:t>
-            </a:r>
-            <a:r>
-              <a:rPr lang="en-US" sz="2400" dirty="0" spc="-1" kern="0">
-                <a:solidFill>
-                  <a:srgbClr val="E4E1D8"/>
-                </a:solidFill>
-                <a:latin typeface="Be Vietnam Pro" pitchFamily="34" charset="0"/>
-                <a:ea typeface="Be Vietnam Pro" pitchFamily="34" charset="-122"/>
-                <a:cs typeface="Be Vietnam Pro" pitchFamily="34" charset="-120"/>
-              </a:rPr>
-              <a:t> cách</a:t>
-            </a:r>
-            <a:r>
-              <a:rPr lang="en-US" sz="2400" dirty="0" spc="4" kern="0">
-                <a:solidFill>
-                  <a:srgbClr val="E4E1D8"/>
-                </a:solidFill>
-                <a:latin typeface="Be Vietnam Pro" pitchFamily="34" charset="0"/>
-                <a:ea typeface="Be Vietnam Pro" pitchFamily="34" charset="-122"/>
-                <a:cs typeface="Be Vietnam Pro" pitchFamily="34" charset="-120"/>
-              </a:rPr>
-              <a:t> dùng</a:t>
-            </a:r>
-            <a:r>
-              <a:rPr lang="en-US" sz="2400" dirty="0" spc="11" kern="0">
-                <a:solidFill>
-                  <a:srgbClr val="E4E1D8"/>
-                </a:solidFill>
-                <a:latin typeface="Be Vietnam Pro" pitchFamily="34" charset="0"/>
-                <a:ea typeface="Be Vietnam Pro" pitchFamily="34" charset="-122"/>
-                <a:cs typeface="Be Vietnam Pro" pitchFamily="34" charset="-120"/>
-              </a:rPr>
               <a:t> đều</a:t>
-            </a:r>
-            <a:r>
-              <a:rPr lang="en-US" sz="2400" dirty="0" spc="1" kern="0">
-                <a:solidFill>
-                  <a:srgbClr val="E4E1D8"/>
-                </a:solidFill>
-                <a:latin typeface="Be Vietnam Pro" pitchFamily="34" charset="0"/>
-                <a:ea typeface="Be Vietnam Pro" pitchFamily="34" charset="-122"/>
-                <a:cs typeface="Be Vietnam Pro" pitchFamily="34" charset="-120"/>
-              </a:rPr>
-              <a:t> phải</a:t>
             </a:r>
             <a:r>
               <a:rPr lang="en-US" sz="2400" dirty="0" spc="-21" kern="0">
@@ -13092,7 +13026,7 @@
               <a:buNone/>
             </a:pPr>
             <a:r>
-              <a:rPr lang="en-US" sz="2850" dirty="0" spc="1" kern="0">
+              <a:rPr lang="en-US" sz="2850" dirty="0" spc="-2" kern="0">
                 <a:solidFill>
                   <a:srgbClr val="14161C"/>
                 </a:solidFill>
@@ -13100,7 +13034,40 @@
                 <a:ea typeface="Be Vietnam Pro" pitchFamily="34" charset="-122"/>
                 <a:cs typeface="Be Vietnam Pro" pitchFamily="34" charset="-120"/>
               </a:rPr>
-              <a:t>Giao</a:t>
+              <a:t>Commit</a:t>
+            </a:r>
+            <a:r>
+              <a:rPr lang="en-US" sz="2850" dirty="0" spc="-23" kern="0">
+                <a:solidFill>
+                  <a:srgbClr val="14161C"/>
+                </a:solidFill>
+                <a:latin typeface="Be Vietnam Pro" pitchFamily="34" charset="0"/>
+                <a:ea typeface="Be Vietnam Pro" pitchFamily="34" charset="-122"/>
+                <a:cs typeface="Be Vietnam Pro" pitchFamily="34" charset="-120"/>
+              </a:rPr>
+              <a:t> trên</a:t>
+            </a:r>
+            <a:r>
+              <a:rPr lang="en-US" sz="2850" dirty="0" spc="-14" kern="0">
+                <a:solidFill>
+                  <a:srgbClr val="14161C"/>
+                </a:solidFill>
+                <a:latin typeface="Be Vietnam Pro" pitchFamily="34" charset="0"/>
+                <a:ea typeface="Be Vietnam Pro" pitchFamily="34" charset="-122"/>
+                <a:cs typeface="Be Vietnam Pro" pitchFamily="34" charset="-120"/>
+              </a:rPr>
+              <a:t> web</a:t>
+            </a:r>
+            <a:r>
+              <a:rPr lang="en-US" sz="2850" dirty="0" spc="-3" kern="0">
+                <a:solidFill>
+                  <a:srgbClr val="14161C"/>
+                </a:solidFill>
+                <a:latin typeface="Be Vietnam Pro" pitchFamily="34" charset="0"/>
+                <a:ea typeface="Be Vietnam Pro" pitchFamily="34" charset="-122"/>
+                <a:cs typeface="Be Vietnam Pro" pitchFamily="34" charset="-120"/>
+              </a:rPr>
+              <a:t> không</a:t>
             </a:r>
             <a:r>
               <a:rPr lang="en-US" sz="2850" dirty="0" spc="0" kern="0">
@@ -13111,10 +13078,10 @@
                 <a:ea typeface="Be Vietnam Pro" pitchFamily="34" charset="-122"/>
                 <a:cs typeface="Be Vietnam Pro" pitchFamily="34" charset="-120"/>
               </a:rPr>
-              <a:t> diện</a:t>
-            </a:r>
-            <a:r>
-              <a:rPr lang="en-US" sz="2850" dirty="0" spc="-14" kern="0">
+              <a:t> tự</a:t>
+            </a:r>
+            <a:r>
+              <a:rPr lang="en-US" sz="2850" dirty="0" spc="-1" kern="0">
                 <a:solidFill>
                   <a:srgbClr val="14161C"/>
                 </a:solidFill>
@@ -13122,10 +13089,10 @@
                 <a:ea typeface="Be Vietnam Pro" pitchFamily="34" charset="-122"/>
                 <a:cs typeface="Be Vietnam Pro" pitchFamily="34" charset="-120"/>
               </a:rPr>
-              <a:t> web</a:t>
-            </a:r>
-            <a:r>
-              <a:rPr lang="en-US" sz="2850" dirty="0" spc="-1" kern="0">
+              <a:t> cập</a:t>
+            </a:r>
+            <a:r>
+              <a:rPr lang="en-US" sz="2850" dirty="0" spc="-13" kern="0">
                 <a:solidFill>
                   <a:srgbClr val="14161C"/>
                 </a:solidFill>
@@ -13133,10 +13100,10 @@
                 <a:ea typeface="Be Vietnam Pro" pitchFamily="34" charset="-122"/>
                 <a:cs typeface="Be Vietnam Pro" pitchFamily="34" charset="-120"/>
               </a:rPr>
-              <a:t> có thể commit</a:t>
-            </a:r>
-            <a:r>
-              <a:rPr lang="en-US" sz="2850" dirty="0" spc="-7" kern="0">
+              <a:t> nhật</a:t>
+            </a:r>
+            <a:r>
+              <a:rPr lang="en-US" sz="2850" dirty="0" spc="5" kern="0">
                 <a:solidFill>
                   <a:srgbClr val="14161C"/>
                 </a:solidFill>
@@ -13144,10 +13111,10 @@
                 <a:ea typeface="Be Vietnam Pro" pitchFamily="34" charset="-122"/>
                 <a:cs typeface="Be Vietnam Pro" pitchFamily="34" charset="-120"/>
               </a:rPr>
-              <a:t> thay</a:t>
-            </a:r>
-            <a:r>
-              <a:rPr lang="en-US" sz="2850" dirty="0" spc="-4" kern="0">
+              <a:t> file</a:t>
+            </a:r>
+            <a:r>
+              <a:rPr lang="en-US" sz="2850" dirty="0" spc="-23" kern="0">
                 <a:solidFill>
                   <a:srgbClr val="14161C"/>
                 </a:solidFill>
@@ -13155,10 +13122,10 @@
                 <a:ea typeface="Be Vietnam Pro" pitchFamily="34" charset="-122"/>
                 <a:cs typeface="Be Vietnam Pro" pitchFamily="34" charset="-120"/>
               </a:rPr>
-              <a:t> bạn.</a:t>
-            </a:r>
-            <a:r>
-              <a:rPr lang="en-US" sz="2850" dirty="0" spc="2" kern="0">
+              <a:t> trên</a:t>
+            </a:r>
+            <a:r>
+              <a:rPr lang="en-US" sz="2850" dirty="0" spc="-9" kern="0">
                 <a:solidFill>
                   <a:srgbClr val="14161C"/>
                 </a:solidFill>
@@ -13166,73 +13133,7 @@
                 <a:ea typeface="Be Vietnam Pro" pitchFamily="34" charset="-122"/>
                 <a:cs typeface="Be Vietnam Pro" pitchFamily="34" charset="-120"/>
               </a:rPr>
-              <a:t> File</a:t>
-            </a:r>
-            <a:r>
-              <a:rPr lang="en-US" sz="2850" dirty="0" spc="-23" kern="0">
-                <a:solidFill>
-                  <a:srgbClr val="14161C"/>
-                </a:solidFill>
-                <a:latin typeface="Be Vietnam Pro" pitchFamily="34" charset="0"/>
-                <a:ea typeface="Be Vietnam Pro" pitchFamily="34" charset="-122"/>
-                <a:cs typeface="Be Vietnam Pro" pitchFamily="34" charset="-120"/>
-              </a:rPr>
-              <a:t> trên</a:t>
-            </a:r>
-            <a:r>
-              <a:rPr lang="en-US" sz="2850" dirty="0" spc="-11" kern="0">
-                <a:solidFill>
-                  <a:srgbClr val="14161C"/>
-                </a:solidFill>
-                <a:latin typeface="Be Vietnam Pro" pitchFamily="34" charset="0"/>
-                <a:ea typeface="Be Vietnam Pro" pitchFamily="34" charset="-122"/>
-                <a:cs typeface="Be Vietnam Pro" pitchFamily="34" charset="-120"/>
-              </a:rPr>
-              <a:t> máy</a:t>
-            </a:r>
-            <a:r>
-              <a:rPr lang="en-US" sz="2850" dirty="0" spc="-3" kern="0">
-                <a:solidFill>
-                  <a:srgbClr val="14161C"/>
-                </a:solidFill>
-                <a:latin typeface="Be Vietnam Pro" pitchFamily="34" charset="0"/>
-                <a:ea typeface="Be Vietnam Pro" pitchFamily="34" charset="-122"/>
-                <a:cs typeface="Be Vietnam Pro" pitchFamily="34" charset="-120"/>
-              </a:rPr>
-              <a:t> không</a:t>
-            </a:r>
-            <a:r>
-              <a:rPr lang="en-US" sz="2850" dirty="0" spc="0" kern="0">
-                <a:solidFill>
-                  <a:srgbClr val="14161C"/>
-                </a:solidFill>
-                <a:latin typeface="Be Vietnam Pro" pitchFamily="34" charset="0"/>
-                <a:ea typeface="Be Vietnam Pro" pitchFamily="34" charset="-122"/>
-                <a:cs typeface="Be Vietnam Pro" pitchFamily="34" charset="-120"/>
-              </a:rPr>
-              <a:t> tự</a:t>
-            </a:r>
-            <a:r>
-              <a:rPr lang="en-US" sz="2850" dirty="0" spc="-1" kern="0">
-                <a:solidFill>
-                  <a:srgbClr val="14161C"/>
-                </a:solidFill>
-                <a:latin typeface="Be Vietnam Pro" pitchFamily="34" charset="0"/>
-                <a:ea typeface="Be Vietnam Pro" pitchFamily="34" charset="-122"/>
-                <a:cs typeface="Be Vietnam Pro" pitchFamily="34" charset="-120"/>
-              </a:rPr>
-              <a:t> cập</a:t>
-            </a:r>
-            <a:r>
-              <a:rPr lang="en-US" sz="2850" dirty="0" spc="-10" kern="0">
-                <a:solidFill>
-                  <a:srgbClr val="14161C"/>
-                </a:solidFill>
-                <a:latin typeface="Be Vietnam Pro" pitchFamily="34" charset="0"/>
-                <a:ea typeface="Be Vietnam Pro" pitchFamily="34" charset="-122"/>
-                <a:cs typeface="Be Vietnam Pro" pitchFamily="34" charset="-120"/>
-              </a:rPr>
-              <a:t> nhật.</a:t>
+              <a:t> máy.</a:t>
             </a:r>
             <a:endParaRPr lang="en-US" sz="2850" dirty="0"/>
           </a:p>
@@ -13349,6 +13250,28 @@
               <a:buNone/>
             </a:pPr>
             <a:r>
+              <a:rPr lang="en-US" sz="2850" dirty="0" spc="-4" kern="0">
+                <a:solidFill>
+                  <a:srgbClr val="F3EEE3"/>
+                </a:solidFill>
+                <a:latin typeface="Be Vietnam Pro" pitchFamily="34" charset="0"/>
+                <a:ea typeface="Be Vietnam Pro" pitchFamily="34" charset="-122"/>
+                <a:cs typeface="Be Vietnam Pro" pitchFamily="34" charset="-120"/>
+              </a:rPr>
+              <a:t>Công</a:t>
+            </a:r>
+            <a:r>
+              <a:rPr lang="en-US" sz="2850" dirty="0" spc="1" kern="0">
+                <a:solidFill>
+                  <a:srgbClr val="F3EEE3"/>
+                </a:solidFill>
+                <a:latin typeface="Be Vietnam Pro" pitchFamily="34" charset="0"/>
+                <a:ea typeface="Be Vietnam Pro" pitchFamily="34" charset="-122"/>
+                <a:cs typeface="Be Vietnam Pro" pitchFamily="34" charset="-120"/>
+              </a:rPr>
+              <a:t> khai</a:t>
+            </a:r>
+            <a:r>
               <a:rPr lang="en-US" sz="2850" dirty="0" spc="-3" kern="0">
                 <a:solidFill>
                   <a:srgbClr val="F3EEE3"/>
@@ -13357,7 +13280,18 @@
                 <a:ea typeface="Be Vietnam Pro" pitchFamily="34" charset="-122"/>
                 <a:cs typeface="Be Vietnam Pro" pitchFamily="34" charset="-120"/>
               </a:rPr>
-              <a:t>Không</a:t>
+              <a:t> không</a:t>
+            </a:r>
+            <a:r>
+              <a:rPr lang="en-US" sz="2850" dirty="0" spc="0" kern="0">
+                <a:solidFill>
+                  <a:srgbClr val="F3EEE3"/>
+                </a:solidFill>
+                <a:latin typeface="Be Vietnam Pro" pitchFamily="34" charset="0"/>
+                <a:ea typeface="Be Vietnam Pro" pitchFamily="34" charset="-122"/>
+                <a:cs typeface="Be Vietnam Pro" pitchFamily="34" charset="-120"/>
+              </a:rPr>
+              <a:t> có nghĩa</a:t>
             </a:r>
             <a:r>
               <a:rPr lang="en-US" sz="2850" dirty="0" spc="4" kern="0">
@@ -13382,7 +13316,7 @@
               <a:t> cũng</a:t>
             </a:r>
             <a:r>
-              <a:rPr lang="en-US" sz="2850" dirty="0" spc="9" kern="0">
+              <a:rPr lang="en-US" sz="2850" dirty="0" spc="0" kern="0">
                 <a:solidFill>
                   <a:srgbClr val="F3EEE3"/>
                 </a:solidFill>
@@ -13390,10 +13324,10 @@
                 <a:ea typeface="Be Vietnam Pro" pitchFamily="34" charset="-122"/>
                 <a:cs typeface="Be Vietnam Pro" pitchFamily="34" charset="-120"/>
               </a:rPr>
-              <a:t> được</a:t>
-            </a:r>
-            <a:r>
-              <a:rPr lang="en-US" sz="2850" dirty="0" spc="-1" kern="0">
+              <a:t> push</a:t>
+            </a:r>
+            <a:r>
+              <a:rPr lang="en-US" sz="2850" dirty="0" spc="8" kern="0">
                 <a:solidFill>
                   <a:srgbClr val="F3EEE3"/>
                 </a:solidFill>
@@ -13401,106 +13335,7 @@
                 <a:ea typeface="Be Vietnam Pro" pitchFamily="34" charset="-122"/>
                 <a:cs typeface="Be Vietnam Pro" pitchFamily="34" charset="-120"/>
               </a:rPr>
-              <a:t> push</a:t>
-            </a:r>
-            <a:r>
-              <a:rPr lang="en-US" sz="2850" dirty="0" spc="-11" kern="0">
-                <a:solidFill>
-                  <a:srgbClr val="F3EEE3"/>
-                </a:solidFill>
-                <a:latin typeface="Be Vietnam Pro" pitchFamily="34" charset="0"/>
-                <a:ea typeface="Be Vietnam Pro" pitchFamily="34" charset="-122"/>
-                <a:cs typeface="Be Vietnam Pro" pitchFamily="34" charset="-120"/>
-              </a:rPr>
-              <a:t> vào</a:t>
-            </a:r>
-            <a:r>
-              <a:rPr lang="en-US" sz="2850" dirty="0" spc="-1" kern="0">
-                <a:solidFill>
-                  <a:srgbClr val="F3EEE3"/>
-                </a:solidFill>
-                <a:latin typeface="Be Vietnam Pro" pitchFamily="34" charset="0"/>
-                <a:ea typeface="Be Vietnam Pro" pitchFamily="34" charset="-122"/>
-                <a:cs typeface="Be Vietnam Pro" pitchFamily="34" charset="-120"/>
-              </a:rPr>
-              <a:t> nhánh</a:t>
-            </a:r>
-            <a:r>
-              <a:rPr lang="en-US" sz="2850" dirty="0" spc="1" kern="0">
-                <a:solidFill>
-                  <a:srgbClr val="F3EEE3"/>
-                </a:solidFill>
-                <a:latin typeface="Be Vietnam Pro" pitchFamily="34" charset="0"/>
-                <a:ea typeface="Be Vietnam Pro" pitchFamily="34" charset="-122"/>
-                <a:cs typeface="Be Vietnam Pro" pitchFamily="34" charset="-120"/>
-              </a:rPr>
-              <a:t> của</a:t>
-            </a:r>
-            <a:r>
-              <a:rPr lang="en-US" sz="2850" dirty="0" spc="-3" kern="0">
-                <a:solidFill>
-                  <a:srgbClr val="F3EEE3"/>
-                </a:solidFill>
-                <a:latin typeface="Be Vietnam Pro" pitchFamily="34" charset="0"/>
-                <a:ea typeface="Be Vietnam Pro" pitchFamily="34" charset="-122"/>
-                <a:cs typeface="Be Vietnam Pro" pitchFamily="34" charset="-120"/>
-              </a:rPr>
-              <a:t> bạn.</a:t>
-            </a:r>
-            <a:r>
-              <a:rPr lang="en-US" sz="2850" dirty="0" spc="-16" kern="0">
-                <a:solidFill>
-                  <a:srgbClr val="F3EEE3"/>
-                </a:solidFill>
-                <a:latin typeface="Be Vietnam Pro" pitchFamily="34" charset="0"/>
-                <a:ea typeface="Be Vietnam Pro" pitchFamily="34" charset="-122"/>
-                <a:cs typeface="Be Vietnam Pro" pitchFamily="34" charset="-120"/>
-              </a:rPr>
-              <a:t> Quyền</a:t>
-            </a:r>
-            <a:r>
-              <a:rPr lang="en-US" sz="2850" dirty="0" spc="10" kern="0">
-                <a:solidFill>
-                  <a:srgbClr val="F3EEE3"/>
-                </a:solidFill>
-                <a:latin typeface="Be Vietnam Pro" pitchFamily="34" charset="0"/>
-                <a:ea typeface="Be Vietnam Pro" pitchFamily="34" charset="-122"/>
-                <a:cs typeface="Be Vietnam Pro" pitchFamily="34" charset="-120"/>
-              </a:rPr>
-              <a:t> đọc</a:t>
-            </a:r>
-            <a:r>
-              <a:rPr lang="en-US" sz="2850" dirty="0" spc="-1" kern="0">
-                <a:solidFill>
-                  <a:srgbClr val="F3EEE3"/>
-                </a:solidFill>
-                <a:latin typeface="Be Vietnam Pro" pitchFamily="34" charset="0"/>
-                <a:ea typeface="Be Vietnam Pro" pitchFamily="34" charset="-122"/>
-                <a:cs typeface="Be Vietnam Pro" pitchFamily="34" charset="-120"/>
-              </a:rPr>
-              <a:t> khác</a:t>
-            </a:r>
-            <a:r>
-              <a:rPr lang="en-US" sz="2850" dirty="0" spc="-18" kern="0">
-                <a:solidFill>
-                  <a:srgbClr val="F3EEE3"/>
-                </a:solidFill>
-                <a:latin typeface="Be Vietnam Pro" pitchFamily="34" charset="0"/>
-                <a:ea typeface="Be Vietnam Pro" pitchFamily="34" charset="-122"/>
-                <a:cs typeface="Be Vietnam Pro" pitchFamily="34" charset="-120"/>
-              </a:rPr>
-              <a:t> quyền</a:t>
-            </a:r>
-            <a:r>
-              <a:rPr lang="en-US" sz="2850" dirty="0" spc="1" kern="0">
-                <a:solidFill>
-                  <a:srgbClr val="F3EEE3"/>
-                </a:solidFill>
-                <a:latin typeface="Be Vietnam Pro" pitchFamily="34" charset="0"/>
-                <a:ea typeface="Be Vietnam Pro" pitchFamily="34" charset="-122"/>
-                <a:cs typeface="Be Vietnam Pro" pitchFamily="34" charset="-120"/>
-              </a:rPr>
-              <a:t> ghi.</a:t>
+              <a:t> được.</a:t>
             </a:r>
             <a:endParaRPr lang="en-US" sz="2850" dirty="0"/>
           </a:p>
